--- a/group4-manufacturing/Group4-Kickoff-Deck.pptx
+++ b/group4-manufacturing/Group4-Kickoff-Deck.pptx
@@ -6109,7 +6109,7 @@
                 <a:ea typeface="Calibri" pitchFamily="34" charset="-122"/>
                 <a:cs typeface="Calibri" pitchFamily="34" charset="-120"/>
               </a:rPr>
-              <a:t>0.8230</a:t>
+              <a:t>0.8229</a:t>
             </a:r>
             <a:endParaRPr lang="en-US" sz="2300" dirty="0"/>
           </a:p>
